--- a/smoke_samples/19_editor_modified.pptx
+++ b/smoke_samples/19_editor_modified.pptx
@@ -232,7 +232,7 @@
         <p:spPr>
           <a:xfrm>
             <a:off x="457200" y="274638"/>
-            <a:ext cx="8230200" cy="1143000"/>
+            <a:ext cx="8229600" cy="1143000"/>
           </a:xfrm>
           <a:prstGeom prst="rect">
             <a:avLst/>
@@ -245,7 +245,7 @@
           <a:p>
             <a:pPr algn="l"/>
             <a:r>
-              <a:rPr lang="en-US" sz="4400" b="1" i="0" dirty="0"/>
+              <a:rPr lang="en-US" sz="4400" b="0" i="0" u="none" dirty="0"/>
               <a:t>Base Slide 1</a:t>
             </a:r>
           </a:p>
@@ -260,7 +260,7 @@
         <p:spPr>
           <a:xfrm>
             <a:off x="457200" y="1600200"/>
-            <a:ext cx="8230200" cy="4572000"/>
+            <a:ext cx="8229600" cy="4572000"/>
           </a:xfrm>
           <a:prstGeom prst="rect">
             <a:avLst/>
@@ -268,14 +268,14 @@
           <a:noFill/>
         </p:spPr>
         <p:txBody>
-          <a:bodyPr wrap="square" rtlCol="0"/>
+          <a:bodyPr wrap="square" rtlCol="0" anchor="t"/>
           <a:lstStyle/>
           <a:p>
             <a:pPr lvl="0" marL="457200" indent="-457200">
               <a:buChar char="•"/>
             </a:pPr>
             <a:r>
-              <a:rPr lang="en-US" sz="2800" b="0" i="0" dirty="0"/>
+              <a:rPr lang="en-US" sz="1800" b="0" i="0" u="none" dirty="0"/>
               <a:t>Original Content</a:t>
             </a:r>
           </a:p>
@@ -306,9 +306,9 @@
       <p:grpSpPr>
         <a:xfrm>
           <a:off x="0" y="0"/>
-          <a:ext cx="9144000" cy="6858000"/>
-          <a:chOff x="0" y="0"/>
-          <a:chExt cx="9144000" cy="6858000"/>
+          <a:ext cx="0" cy="0"/>
+          <a:chOff x="0" y="0"/>
+          <a:chExt cx="0" cy="0"/>
         </a:xfrm>
       </p:grpSpPr>
       <p:sp>
@@ -320,7 +320,7 @@
         <p:spPr>
           <a:xfrm>
             <a:off x="457200" y="274638"/>
-            <a:ext cx="8230200" cy="1143000"/>
+            <a:ext cx="-914400" cy="1143000"/>
           </a:xfrm>
           <a:prstGeom prst="rect">
             <a:avLst/>
@@ -333,7 +333,7 @@
           <a:p>
             <a:pPr algn="l"/>
             <a:r>
-              <a:rPr lang="en-US" sz="4400" b="1" i="0" dirty="0"/>
+              <a:rPr lang="en-US" sz="4400" b="0" i="0" u="none" dirty="0"/>
               <a:t>Updated Slide 3</a:t>
             </a:r>
           </a:p>
@@ -348,7 +348,7 @@
         <p:spPr>
           <a:xfrm>
             <a:off x="457200" y="1600200"/>
-            <a:ext cx="8230200" cy="4572000"/>
+            <a:ext cx="-914400" cy="4572000"/>
           </a:xfrm>
           <a:prstGeom prst="rect">
             <a:avLst/>
@@ -356,14 +356,14 @@
           <a:noFill/>
         </p:spPr>
         <p:txBody>
-          <a:bodyPr wrap="square" rtlCol="0"/>
+          <a:bodyPr wrap="square" rtlCol="0" anchor="t"/>
           <a:lstStyle/>
           <a:p>
             <a:pPr lvl="0" marL="457200" indent="-457200">
               <a:buChar char="•"/>
             </a:pPr>
             <a:r>
-              <a:rPr lang="en-US" sz="2800" b="0" i="0" dirty="0"/>
+              <a:rPr lang="en-US" sz="1800" b="0" i="0" u="none" dirty="0"/>
               <a:t>Content has been changed via UpdateSlide</a:t>
             </a:r>
           </a:p>
@@ -394,9 +394,9 @@
       <p:grpSpPr>
         <a:xfrm>
           <a:off x="0" y="0"/>
-          <a:ext cx="9144000" cy="6858000"/>
-          <a:chOff x="0" y="0"/>
-          <a:chExt cx="9144000" cy="6858000"/>
+          <a:ext cx="0" cy="0"/>
+          <a:chOff x="0" y="0"/>
+          <a:chExt cx="0" cy="0"/>
         </a:xfrm>
       </p:grpSpPr>
       <p:sp>
@@ -408,7 +408,7 @@
         <p:spPr>
           <a:xfrm>
             <a:off x="457200" y="274638"/>
-            <a:ext cx="8230200" cy="1143000"/>
+            <a:ext cx="-914400" cy="1143000"/>
           </a:xfrm>
           <a:prstGeom prst="rect">
             <a:avLst/>
@@ -421,7 +421,7 @@
           <a:p>
             <a:pPr algn="l"/>
             <a:r>
-              <a:rPr lang="en-US" sz="4400" b="1" i="0" dirty="0"/>
+              <a:rPr lang="en-US" sz="4400" b="0" i="0" u="none" dirty="0"/>
               <a:t>Newly Added Slide</a:t>
             </a:r>
           </a:p>
@@ -436,7 +436,7 @@
         <p:spPr>
           <a:xfrm>
             <a:off x="457200" y="1600200"/>
-            <a:ext cx="8230200" cy="4572000"/>
+            <a:ext cx="-914400" cy="4572000"/>
           </a:xfrm>
           <a:prstGeom prst="rect">
             <a:avLst/>
@@ -444,14 +444,14 @@
           <a:noFill/>
         </p:spPr>
         <p:txBody>
-          <a:bodyPr wrap="square" rtlCol="0"/>
+          <a:bodyPr wrap="square" rtlCol="0" anchor="t"/>
           <a:lstStyle/>
           <a:p>
             <a:pPr lvl="0" marL="457200" indent="-457200">
               <a:buChar char="•"/>
             </a:pPr>
             <a:r>
-              <a:rPr lang="en-US" sz="2800" b="0" i="0" dirty="0"/>
+              <a:rPr lang="en-US" sz="1800" b="0" i="0" u="none" dirty="0"/>
               <a:t>Added via AddSlide</a:t>
             </a:r>
           </a:p>
@@ -496,7 +496,7 @@
         <p:spPr>
           <a:xfrm>
             <a:off x="457200" y="274638"/>
-            <a:ext cx="8230200" cy="1143000"/>
+            <a:ext cx="8229600" cy="1143000"/>
           </a:xfrm>
           <a:prstGeom prst="rect">
             <a:avLst/>
@@ -509,7 +509,7 @@
           <a:p>
             <a:pPr algn="l"/>
             <a:r>
-              <a:rPr lang="en-US" sz="4400" b="1" i="0" dirty="0"/>
+              <a:rPr lang="en-US" sz="4400" b="0" i="0" u="none" dirty="0"/>
               <a:t>Basic PPTX Generation</a:t>
             </a:r>
           </a:p>
@@ -524,7 +524,7 @@
         <p:spPr>
           <a:xfrm>
             <a:off x="457200" y="1600200"/>
-            <a:ext cx="8230200" cy="4572000"/>
+            <a:ext cx="8229600" cy="4572000"/>
           </a:xfrm>
           <a:prstGeom prst="rect">
             <a:avLst/>
@@ -539,7 +539,7 @@
               <a:buChar char="•"/>
             </a:pPr>
             <a:r>
-              <a:rPr lang="en-US" sz="2800" b="0" i="0" dirty="0"/>
+              <a:rPr lang="en-US" sz="2800" b="0" i="0" u="none" dirty="0"/>
               <a:t>Simple slide creation</a:t>
             </a:r>
           </a:p>
@@ -548,7 +548,7 @@
               <a:buChar char="•"/>
             </a:pPr>
             <a:r>
-              <a:rPr lang="en-US" sz="2800" b="0" i="0" dirty="0"/>
+              <a:rPr lang="en-US" sz="2800" b="0" i="0" u="none" dirty="0"/>
               <a:t>Title and bullet points</a:t>
             </a:r>
           </a:p>
@@ -557,7 +557,7 @@
               <a:buChar char="•"/>
             </a:pPr>
             <a:r>
-              <a:rPr lang="en-US" sz="2800" b="0" i="0" dirty="0"/>
+              <a:rPr lang="en-US" sz="2800" b="0" i="0" u="none" dirty="0"/>
               <a:t>Task 01 complete</a:t>
             </a:r>
           </a:p>

--- a/smoke_samples/19_editor_modified.pptx
+++ b/smoke_samples/19_editor_modified.pptx
@@ -204,11 +204,6 @@
 <file path=ppt/slides/slide1.xml><?xml version="1.0" encoding="utf-8"?>
 <p:sld xmlns:a="http://schemas.openxmlformats.org/drawingml/2006/main" xmlns:c="http://schemas.openxmlformats.org/drawingml/2006/chart" xmlns:r="http://schemas.openxmlformats.org/officeDocument/2006/relationships" xmlns:p="http://schemas.openxmlformats.org/presentationml/2006/main">
   <p:cSld>
-    <p:bg>
-      <p:bgRef idx="1001">
-        <a:schemeClr val="bg1"/>
-      </p:bgRef>
-    </p:bg>
     <p:spTree>
       <p:nvGrpSpPr>
         <p:cNvPr id="1" name=""/>
@@ -292,187 +287,6 @@
 <file path=ppt/slides/slide3.xml><?xml version="1.0" encoding="utf-8"?>
 <p:sld xmlns:a="http://schemas.openxmlformats.org/drawingml/2006/main" xmlns:c="http://schemas.openxmlformats.org/drawingml/2006/chart" xmlns:r="http://schemas.openxmlformats.org/officeDocument/2006/relationships" xmlns:p="http://schemas.openxmlformats.org/presentationml/2006/main">
   <p:cSld>
-    <p:bg>
-      <p:bgRef idx="1001">
-        <a:schemeClr val="bg1"/>
-      </p:bgRef>
-    </p:bg>
-    <p:spTree>
-      <p:nvGrpSpPr>
-        <p:cNvPr id="1" name=""/>
-        <p:cNvGrpSpPr/>
-        <p:nvPr/>
-      </p:nvGrpSpPr>
-      <p:grpSpPr>
-        <a:xfrm>
-          <a:off x="0" y="0"/>
-          <a:ext cx="0" cy="0"/>
-          <a:chOff x="0" y="0"/>
-          <a:chExt cx="0" cy="0"/>
-        </a:xfrm>
-      </p:grpSpPr>
-      <p:sp>
-        <p:nvSpPr>
-          <p:cNvPr id="2" name="Title"/>
-          <p:cNvSpPr txBox="1"/>
-          <p:nvPr/>
-        </p:nvSpPr>
-        <p:spPr>
-          <a:xfrm>
-            <a:off x="457200" y="274638"/>
-            <a:ext cx="-914400" cy="1143000"/>
-          </a:xfrm>
-          <a:prstGeom prst="rect">
-            <a:avLst/>
-          </a:prstGeom>
-          <a:noFill/>
-        </p:spPr>
-        <p:txBody>
-          <a:bodyPr wrap="square" rtlCol="0" anchor="ctr"/>
-          <a:lstStyle/>
-          <a:p>
-            <a:pPr algn="l"/>
-            <a:r>
-              <a:rPr lang="en-US" sz="4400" b="0" i="0" u="none" dirty="0"/>
-              <a:t>Updated Slide 3</a:t>
-            </a:r>
-          </a:p>
-        </p:txBody>
-      </p:sp>
-      <p:sp>
-        <p:nvSpPr>
-          <p:cNvPr id="3" name="Content"/>
-          <p:cNvSpPr txBox="1"/>
-          <p:nvPr/>
-        </p:nvSpPr>
-        <p:spPr>
-          <a:xfrm>
-            <a:off x="457200" y="1600200"/>
-            <a:ext cx="-914400" cy="4572000"/>
-          </a:xfrm>
-          <a:prstGeom prst="rect">
-            <a:avLst/>
-          </a:prstGeom>
-          <a:noFill/>
-        </p:spPr>
-        <p:txBody>
-          <a:bodyPr wrap="square" rtlCol="0" anchor="t"/>
-          <a:lstStyle/>
-          <a:p>
-            <a:pPr lvl="0" marL="457200" indent="-457200">
-              <a:buChar char="•"/>
-            </a:pPr>
-            <a:r>
-              <a:rPr lang="en-US" sz="1800" b="0" i="0" u="none" dirty="0"/>
-              <a:t>Content has been changed via UpdateSlide</a:t>
-            </a:r>
-          </a:p>
-        </p:txBody>
-      </p:sp>
-    </p:spTree>
-  </p:cSld>
-  <p:clrMapOvr>
-    <a:masterClrMapping/>
-  </p:clrMapOvr>
-</p:sld>
-</file>
-
-<file path=ppt/slides/slide4.xml><?xml version="1.0" encoding="utf-8"?>
-<p:sld xmlns:a="http://schemas.openxmlformats.org/drawingml/2006/main" xmlns:c="http://schemas.openxmlformats.org/drawingml/2006/chart" xmlns:r="http://schemas.openxmlformats.org/officeDocument/2006/relationships" xmlns:p="http://schemas.openxmlformats.org/presentationml/2006/main">
-  <p:cSld>
-    <p:bg>
-      <p:bgRef idx="1001">
-        <a:schemeClr val="bg1"/>
-      </p:bgRef>
-    </p:bg>
-    <p:spTree>
-      <p:nvGrpSpPr>
-        <p:cNvPr id="1" name=""/>
-        <p:cNvGrpSpPr/>
-        <p:nvPr/>
-      </p:nvGrpSpPr>
-      <p:grpSpPr>
-        <a:xfrm>
-          <a:off x="0" y="0"/>
-          <a:ext cx="0" cy="0"/>
-          <a:chOff x="0" y="0"/>
-          <a:chExt cx="0" cy="0"/>
-        </a:xfrm>
-      </p:grpSpPr>
-      <p:sp>
-        <p:nvSpPr>
-          <p:cNvPr id="2" name="Title"/>
-          <p:cNvSpPr txBox="1"/>
-          <p:nvPr/>
-        </p:nvSpPr>
-        <p:spPr>
-          <a:xfrm>
-            <a:off x="457200" y="274638"/>
-            <a:ext cx="-914400" cy="1143000"/>
-          </a:xfrm>
-          <a:prstGeom prst="rect">
-            <a:avLst/>
-          </a:prstGeom>
-          <a:noFill/>
-        </p:spPr>
-        <p:txBody>
-          <a:bodyPr wrap="square" rtlCol="0" anchor="ctr"/>
-          <a:lstStyle/>
-          <a:p>
-            <a:pPr algn="l"/>
-            <a:r>
-              <a:rPr lang="en-US" sz="4400" b="0" i="0" u="none" dirty="0"/>
-              <a:t>Newly Added Slide</a:t>
-            </a:r>
-          </a:p>
-        </p:txBody>
-      </p:sp>
-      <p:sp>
-        <p:nvSpPr>
-          <p:cNvPr id="3" name="Content"/>
-          <p:cNvSpPr txBox="1"/>
-          <p:nvPr/>
-        </p:nvSpPr>
-        <p:spPr>
-          <a:xfrm>
-            <a:off x="457200" y="1600200"/>
-            <a:ext cx="-914400" cy="4572000"/>
-          </a:xfrm>
-          <a:prstGeom prst="rect">
-            <a:avLst/>
-          </a:prstGeom>
-          <a:noFill/>
-        </p:spPr>
-        <p:txBody>
-          <a:bodyPr wrap="square" rtlCol="0" anchor="t"/>
-          <a:lstStyle/>
-          <a:p>
-            <a:pPr lvl="0" marL="457200" indent="-457200">
-              <a:buChar char="•"/>
-            </a:pPr>
-            <a:r>
-              <a:rPr lang="en-US" sz="1800" b="0" i="0" u="none" dirty="0"/>
-              <a:t>Added via AddSlide</a:t>
-            </a:r>
-          </a:p>
-        </p:txBody>
-      </p:sp>
-    </p:spTree>
-  </p:cSld>
-  <p:clrMapOvr>
-    <a:masterClrMapping/>
-  </p:clrMapOvr>
-</p:sld>
-</file>
-
-<file path=ppt/slides/slide5.xml><?xml version="1.0" encoding="utf-8"?>
-<p:sld xmlns:a="http://schemas.openxmlformats.org/drawingml/2006/main" xmlns:c="http://schemas.openxmlformats.org/drawingml/2006/chart" xmlns:r="http://schemas.openxmlformats.org/officeDocument/2006/relationships" xmlns:p="http://schemas.openxmlformats.org/presentationml/2006/main">
-  <p:cSld>
-    <p:bg>
-      <p:bgRef idx="1001">
-        <a:schemeClr val="bg1"/>
-      </p:bgRef>
-    </p:bg>
     <p:spTree>
       <p:nvGrpSpPr>
         <p:cNvPr id="1" name=""/>
@@ -510,7 +324,7 @@
             <a:pPr algn="l"/>
             <a:r>
               <a:rPr lang="en-US" sz="4400" b="0" i="0" u="none" dirty="0"/>
-              <a:t>Basic PPTX Generation</a:t>
+              <a:t>Updated Slide 3</a:t>
             </a:r>
           </a:p>
         </p:txBody>
@@ -532,32 +346,198 @@
           <a:noFill/>
         </p:spPr>
         <p:txBody>
-          <a:bodyPr wrap="square" rtlCol="0"/>
+          <a:bodyPr wrap="square" rtlCol="0" anchor="t"/>
           <a:lstStyle/>
           <a:p>
             <a:pPr lvl="0" marL="457200" indent="-457200">
               <a:buChar char="•"/>
             </a:pPr>
             <a:r>
-              <a:rPr lang="en-US" sz="2800" b="0" i="0" u="none" dirty="0"/>
-              <a:t>Simple slide creation</a:t>
-            </a:r>
-          </a:p>
+              <a:rPr lang="en-US" sz="1800" b="0" i="0" u="none" dirty="0"/>
+              <a:t>Content has been changed via UpdateSlide</a:t>
+            </a:r>
+          </a:p>
+        </p:txBody>
+      </p:sp>
+    </p:spTree>
+  </p:cSld>
+  <p:clrMapOvr>
+    <a:masterClrMapping/>
+  </p:clrMapOvr>
+</p:sld>
+</file>
+
+<file path=ppt/slides/slide4.xml><?xml version="1.0" encoding="utf-8"?>
+<p:sld xmlns:a="http://schemas.openxmlformats.org/drawingml/2006/main" xmlns:c="http://schemas.openxmlformats.org/drawingml/2006/chart" xmlns:r="http://schemas.openxmlformats.org/officeDocument/2006/relationships" xmlns:p="http://schemas.openxmlformats.org/presentationml/2006/main">
+  <p:cSld>
+    <p:spTree>
+      <p:nvGrpSpPr>
+        <p:cNvPr id="1" name=""/>
+        <p:cNvGrpSpPr/>
+        <p:nvPr/>
+      </p:nvGrpSpPr>
+      <p:grpSpPr>
+        <a:xfrm>
+          <a:off x="0" y="0"/>
+          <a:ext cx="9144000" cy="6858000"/>
+          <a:chOff x="0" y="0"/>
+          <a:chExt cx="9144000" cy="6858000"/>
+        </a:xfrm>
+      </p:grpSpPr>
+      <p:sp>
+        <p:nvSpPr>
+          <p:cNvPr id="2" name="Title"/>
+          <p:cNvSpPr txBox="1"/>
+          <p:nvPr/>
+        </p:nvSpPr>
+        <p:spPr>
+          <a:xfrm>
+            <a:off x="457200" y="274638"/>
+            <a:ext cx="8229600" cy="1143000"/>
+          </a:xfrm>
+          <a:prstGeom prst="rect">
+            <a:avLst/>
+          </a:prstGeom>
+          <a:noFill/>
+        </p:spPr>
+        <p:txBody>
+          <a:bodyPr wrap="square" rtlCol="0" anchor="ctr"/>
+          <a:lstStyle/>
+          <a:p>
+            <a:pPr algn="l"/>
+            <a:r>
+              <a:rPr lang="en-US" sz="4400" b="0" i="0" u="none" dirty="0"/>
+              <a:t>Newly Added Slide</a:t>
+            </a:r>
+          </a:p>
+        </p:txBody>
+      </p:sp>
+      <p:sp>
+        <p:nvSpPr>
+          <p:cNvPr id="3" name="Content"/>
+          <p:cNvSpPr txBox="1"/>
+          <p:nvPr/>
+        </p:nvSpPr>
+        <p:spPr>
+          <a:xfrm>
+            <a:off x="457200" y="1600200"/>
+            <a:ext cx="8229600" cy="4572000"/>
+          </a:xfrm>
+          <a:prstGeom prst="rect">
+            <a:avLst/>
+          </a:prstGeom>
+          <a:noFill/>
+        </p:spPr>
+        <p:txBody>
+          <a:bodyPr wrap="square" rtlCol="0" anchor="t"/>
+          <a:lstStyle/>
           <a:p>
             <a:pPr lvl="0" marL="457200" indent="-457200">
               <a:buChar char="•"/>
             </a:pPr>
             <a:r>
-              <a:rPr lang="en-US" sz="2800" b="0" i="0" u="none" dirty="0"/>
-              <a:t>Title and bullet points</a:t>
-            </a:r>
-          </a:p>
+              <a:rPr lang="en-US" sz="1800" b="0" i="0" u="none" dirty="0"/>
+              <a:t>Added via AddSlide</a:t>
+            </a:r>
+          </a:p>
+        </p:txBody>
+      </p:sp>
+    </p:spTree>
+  </p:cSld>
+  <p:clrMapOvr>
+    <a:masterClrMapping/>
+  </p:clrMapOvr>
+</p:sld>
+</file>
+
+<file path=ppt/slides/slide5.xml><?xml version="1.0" encoding="utf-8"?>
+<p:sld xmlns:a="http://schemas.openxmlformats.org/drawingml/2006/main" xmlns:c="http://schemas.openxmlformats.org/drawingml/2006/chart" xmlns:r="http://schemas.openxmlformats.org/officeDocument/2006/relationships" xmlns:p="http://schemas.openxmlformats.org/presentationml/2006/main">
+  <p:cSld>
+    <p:spTree>
+      <p:nvGrpSpPr>
+        <p:cNvPr id="1" name=""/>
+        <p:cNvGrpSpPr/>
+        <p:nvPr/>
+      </p:nvGrpSpPr>
+      <p:grpSpPr>
+        <a:xfrm>
+          <a:off x="0" y="0"/>
+          <a:ext cx="9144000" cy="6858000"/>
+          <a:chOff x="0" y="0"/>
+          <a:chExt cx="9144000" cy="6858000"/>
+        </a:xfrm>
+      </p:grpSpPr>
+      <p:sp>
+        <p:nvSpPr>
+          <p:cNvPr id="2" name="Title"/>
+          <p:cNvSpPr txBox="1"/>
+          <p:nvPr/>
+        </p:nvSpPr>
+        <p:spPr>
+          <a:xfrm>
+            <a:off x="457200" y="274638"/>
+            <a:ext cx="8229600" cy="1143000"/>
+          </a:xfrm>
+          <a:prstGeom prst="rect">
+            <a:avLst/>
+          </a:prstGeom>
+          <a:noFill/>
+        </p:spPr>
+        <p:txBody>
+          <a:bodyPr wrap="square" rtlCol="0" anchor="ctr"/>
+          <a:lstStyle/>
+          <a:p>
+            <a:pPr algn="l"/>
+            <a:r>
+              <a:rPr lang="en-US" sz="4400" b="0" i="0" u="none" dirty="0"/>
+              <a:t>Basic PPTX Generation</a:t>
+            </a:r>
+          </a:p>
+        </p:txBody>
+      </p:sp>
+      <p:sp>
+        <p:nvSpPr>
+          <p:cNvPr id="3" name="Content"/>
+          <p:cNvSpPr txBox="1"/>
+          <p:nvPr/>
+        </p:nvSpPr>
+        <p:spPr>
+          <a:xfrm>
+            <a:off x="457200" y="1600200"/>
+            <a:ext cx="8229600" cy="4572000"/>
+          </a:xfrm>
+          <a:prstGeom prst="rect">
+            <a:avLst/>
+          </a:prstGeom>
+          <a:noFill/>
+        </p:spPr>
+        <p:txBody>
+          <a:bodyPr wrap="square" rtlCol="0" anchor="t"/>
+          <a:lstStyle/>
           <a:p>
             <a:pPr lvl="0" marL="457200" indent="-457200">
               <a:buChar char="•"/>
             </a:pPr>
             <a:r>
-              <a:rPr lang="en-US" sz="2800" b="0" i="0" u="none" dirty="0"/>
+              <a:rPr lang="en-US" sz="1800" b="0" i="0" u="none" dirty="0"/>
+              <a:t>Simple slide creation</a:t>
+            </a:r>
+          </a:p>
+          <a:p>
+            <a:pPr lvl="0" marL="457200" indent="-457200">
+              <a:buChar char="•"/>
+            </a:pPr>
+            <a:r>
+              <a:rPr lang="en-US" sz="1800" b="0" i="0" u="none" dirty="0"/>
+              <a:t>Title and bullet points</a:t>
+            </a:r>
+          </a:p>
+          <a:p>
+            <a:pPr lvl="0" marL="457200" indent="-457200">
+              <a:buChar char="•"/>
+            </a:pPr>
+            <a:r>
+              <a:rPr lang="en-US" sz="1800" b="0" i="0" u="none" dirty="0"/>
               <a:t>Task 01 complete</a:t>
             </a:r>
           </a:p>
@@ -572,9 +552,9 @@
 </file>
 
 <file path=ppt/theme/theme1.xml><?xml version="1.0" encoding="utf-8"?>
-<a:theme xmlns:a="http://schemas.openxmlformats.org/drawingml/2006/main" name="Office Theme">
+<a:theme xmlns:a="http://schemas.openxmlformats.org/drawingml/2006/main" name="Office Theme marketing">
   <a:themeElements>
-    <a:clrScheme name="Office">
+    <a:clrScheme name="Office colors">
       <a:dk1>
         <a:sysClr val="windowText" lastClr="000000"/>
       </a:dk1>
@@ -612,7 +592,7 @@
         <a:srgbClr val="800080"/>
       </a:folHlink>
     </a:clrScheme>
-    <a:fontScheme name="Office">
+    <a:fontScheme name="Office fonts">
       <a:majorFont>
         <a:latin typeface="Calibri"/>
         <a:ea typeface=""/>
